--- a/docs/09-演示材料/CodeStreak-功能速览.pptx
+++ b/docs/09-演示材料/CodeStreak-功能速览.pptx
@@ -503,7 +503,37 @@
           <a:lstStyle/>
           <a:p>
             <a:r>
-              <a:t>第一页讲清楚产品是什么、解决什么问题。CodeStreak 是 HarmonyOS 上的跨平台刷题打卡应用：每天完成 2 道目标题，连续天数不断增长；题单按求职/竞赛分开；比赛日历汇总真实赛程。右侧是首页实机截图，可以看到当前连胜、今日进度、周矩阵、今日推荐和竞赛挑战。</a:t>
+              <a:t>【开场】各位老师、同学好，我是余翔宇。我介绍的项目叫 CodeStreak，一个跑在 HarmonyOS 上的跨平台刷题打卡应用。</a:t>
+            </a:r>
+          </a:p>
+          <a:p/>
+          <a:p>
+            <a:r>
+              <a:t>【产品问题】我们刷题通常散在 Codeforces、AtCoder、洛谷、牛客、LeetCode 五个平台。今天做了几题、连续了几天、下一场比赛什么时候，要来回切好几个网站。CodeStreak 想把这些收在一个应用里。</a:t>
+            </a:r>
+          </a:p>
+          <a:p/>
+          <a:p>
+            <a:r>
+              <a:t>【功能 1 今日打卡】每天给自己定 2 道题：目标卡算一道，竞赛挑战算一道。完成第一道，进度从 0/2 变成 1/2；第二道拉满 2/2，连续天数加一，会弹一个庆祝反馈。没有网络也能打卡，数据存在本机。</a:t>
+            </a:r>
+          </a:p>
+          <a:p/>
+          <a:p>
+            <a:r>
+              <a:t>【功能 2 题单矩阵】上面可以切「求职高频」和「算法竞赛」，两条赛道的题单和题目是分开的，不会混；平台多选、难度单选；点题单卡直接打开官方题单页。</a:t>
+            </a:r>
+          </a:p>
+          <a:p/>
+          <a:p>
+            <a:r>
+              <a:t>【功能 3 比赛日历】ICPC、CCPC 分站赛，加上 Codeforces 和 AtCoder 的赛程，按时间排好；点一下去报名或看榜单。</a:t>
+            </a:r>
+          </a:p>
+          <a:p/>
+          <a:p>
+            <a:r>
+              <a:t>【指截图】右边是首页实机截图：当前连胜、今日进度、本周矩阵、今日推荐和竞赛挑战都在这一屏。底部五个平台就是同步范围。</a:t>
             </a:r>
           </a:p>
         </p:txBody>
@@ -573,7 +603,49 @@
           <a:lstStyle/>
           <a:p>
             <a:r>
-              <a:t>第二页讲差异化和可信度。左侧动图是真实操作：完成打卡、切换求职/竞赛赛道、关闭一个平台看筛选、打开比赛日历。右侧三点：数据全部真实计算，没有就空态；五平台同步带节流与重试；工程上 90 条单测、87.7% 行覆盖，代码已开源。</a:t>
+              <a:t>【过渡】那它凭什么可信？看第二页。</a:t>
+            </a:r>
+          </a:p>
+          <a:p/>
+          <a:p>
+            <a:r>
+              <a:t>【三条主线】第二页讲三件事：数据是不是真的、同步能不能用、工程是不是可交付。</a:t>
+            </a:r>
+          </a:p>
+          <a:p/>
+          <a:p>
+            <a:r>
+              <a:t>【第 1 条 真实数据】今日 AC、连续天数、热力图、难度分布，全部从本地数据库算出来。没有数据就显示空态，不会拿 0/60、93% 这种演示数字糊弄人。这是整个项目最坚持的一点。</a:t>
+            </a:r>
+          </a:p>
+          <a:p/>
+          <a:p>
+            <a:r>
+              <a:t>【第 2 条 五平台同步】五个平台都接了：公开 API 直接拉；需要登录的用内置 WebView 登录后导入。请求有节流，失败按 1 分钟、5 分钟、15 分钟退避重试，不会一直打平台接口。</a:t>
+            </a:r>
+          </a:p>
+          <a:p/>
+          <a:p>
+            <a:r>
+              <a:t>【第 3 条 工程质量】90 条单元测试全部通过，行覆盖率 87.7%；分层图标、隐私说明、发布前自测报告都做了；代码用 Git 管理，已开源在 GitHub。</a:t>
+            </a:r>
+          </a:p>
+          <a:p/>
+          <a:p>
+            <a:r>
+              <a:t>【指左侧动图】左边这段是真实操作：打卡、切赛道、关掉一个平台看筛选、打开比赛日历，都是模拟器实录，不是做的动画。</a:t>
+            </a:r>
+          </a:p>
+          <a:p/>
+          <a:p>
+            <a:r>
+              <a:t>【指底部数字】90 条单测、87.7% 行覆盖、5 个平台同步。</a:t>
+            </a:r>
+          </a:p>
+          <a:p/>
+          <a:p>
+            <a:r>
+              <a:t>【收尾】一句话：CodeStreak 不是又一个题库，而是把「每天做两题」变得看得见、接得上、断不了。谢谢大家。</a:t>
             </a:r>
           </a:p>
         </p:txBody>

--- a/docs/09-演示材料/CodeStreak-功能速览.pptx
+++ b/docs/09-演示材料/CodeStreak-功能速览.pptx
@@ -503,37 +503,13 @@
           <a:lstStyle/>
           <a:p>
             <a:r>
-              <a:t>【开场】各位老师、同学好，我是余翔宇。我介绍的项目叫 CodeStreak，一个跑在 HarmonyOS 上的跨平台刷题打卡应用。</a:t>
+              <a:t>各位老师好，我是余翔宇。我介绍的是 CodeStreak，一个在 HarmonyOS 上把五个刷题平台收在一起的打卡应用。</a:t>
             </a:r>
           </a:p>
           <a:p/>
           <a:p>
             <a:r>
-              <a:t>【产品问题】我们刷题通常散在 Codeforces、AtCoder、洛谷、牛客、LeetCode 五个平台。今天做了几题、连续了几天、下一场比赛什么时候，要来回切好几个网站。CodeStreak 想把这些收在一个应用里。</a:t>
-            </a:r>
-          </a:p>
-          <a:p/>
-          <a:p>
-            <a:r>
-              <a:t>【功能 1 今日打卡】每天给自己定 2 道题：目标卡算一道，竞赛挑战算一道。完成第一道，进度从 0/2 变成 1/2；第二道拉满 2/2，连续天数加一，会弹一个庆祝反馈。没有网络也能打卡，数据存在本机。</a:t>
-            </a:r>
-          </a:p>
-          <a:p/>
-          <a:p>
-            <a:r>
-              <a:t>【功能 2 题单矩阵】上面可以切「求职高频」和「算法竞赛」，两条赛道的题单和题目是分开的，不会混；平台多选、难度单选；点题单卡直接打开官方题单页。</a:t>
-            </a:r>
-          </a:p>
-          <a:p/>
-          <a:p>
-            <a:r>
-              <a:t>【功能 3 比赛日历】ICPC、CCPC 分站赛，加上 Codeforces 和 AtCoder 的赛程，按时间排好；点一下去报名或看榜单。</a:t>
-            </a:r>
-          </a:p>
-          <a:p/>
-          <a:p>
-            <a:r>
-              <a:t>【指截图】右边是首页实机截图：当前连胜、今日进度、本周矩阵、今日推荐和竞赛挑战都在这一屏。底部五个平台就是同步范围。</a:t>
+              <a:t>我们刷题通常散在 Codeforces、AtCoder、洛谷、牛客、LeetCode，今天做了几题、连续几天、下一场比赛，都要来回切网站。CodeStreak 把今日打卡、题单矩阵、比赛日历、统计榜单放在一个应用里：每天完成两道题，连续天数加一；题单分求职和竞赛两条赛道；赛程按时间排好，点一下就能去报名或看榜单。</a:t>
             </a:r>
           </a:p>
         </p:txBody>
@@ -603,49 +579,13 @@
           <a:lstStyle/>
           <a:p>
             <a:r>
-              <a:t>【过渡】那它凭什么可信？看第二页。</a:t>
+              <a:t>第二页想说明它不只是界面。今日 AC、连续天数、热力图、难度分布都从本地记录算出来，没有数据就显示空态，不拿演示数字充数；五个平台都能同步，失败会按 1、5、15 分钟退避重试；工程上有 90 条单测、87.7% 行覆盖，代码已经开源。</a:t>
             </a:r>
           </a:p>
           <a:p/>
           <a:p>
             <a:r>
-              <a:t>【三条主线】第二页讲三件事：数据是不是真的、同步能不能用、工程是不是可交付。</a:t>
-            </a:r>
-          </a:p>
-          <a:p/>
-          <a:p>
-            <a:r>
-              <a:t>【第 1 条 真实数据】今日 AC、连续天数、热力图、难度分布，全部从本地数据库算出来。没有数据就显示空态，不会拿 0/60、93% 这种演示数字糊弄人。这是整个项目最坚持的一点。</a:t>
-            </a:r>
-          </a:p>
-          <a:p/>
-          <a:p>
-            <a:r>
-              <a:t>【第 2 条 五平台同步】五个平台都接了：公开 API 直接拉；需要登录的用内置 WebView 登录后导入。请求有节流，失败按 1 分钟、5 分钟、15 分钟退避重试，不会一直打平台接口。</a:t>
-            </a:r>
-          </a:p>
-          <a:p/>
-          <a:p>
-            <a:r>
-              <a:t>【第 3 条 工程质量】90 条单元测试全部通过，行覆盖率 87.7%；分层图标、隐私说明、发布前自测报告都做了；代码用 Git 管理，已开源在 GitHub。</a:t>
-            </a:r>
-          </a:p>
-          <a:p/>
-          <a:p>
-            <a:r>
-              <a:t>【指左侧动图】左边这段是真实操作：打卡、切赛道、关掉一个平台看筛选、打开比赛日历，都是模拟器实录，不是做的动画。</a:t>
-            </a:r>
-          </a:p>
-          <a:p/>
-          <a:p>
-            <a:r>
-              <a:t>【指底部数字】90 条单测、87.7% 行覆盖、5 个平台同步。</a:t>
-            </a:r>
-          </a:p>
-          <a:p/>
-          <a:p>
-            <a:r>
-              <a:t>【收尾】一句话：CodeStreak 不是又一个题库，而是把「每天做两题」变得看得见、接得上、断不了。谢谢大家。</a:t>
+              <a:t>左边这段动图是真实操作：打卡、切赛道、筛选平台、打开赛程。一句话总结，CodeStreak 让“每天做两题”这件事看得见、接得上、断不了。谢谢大家。</a:t>
             </a:r>
           </a:p>
         </p:txBody>
